--- a/Apteros_presentation_v2.pptx
+++ b/Apteros_presentation_v2.pptx
@@ -353,7 +353,7 @@
             <a:pPr indent="0" algn="r">
               <a:buNone/>
             </a:pPr>
-            <a:fld id="{27832AD2-EF9E-4DBB-82AE-54C70720DC01}" type="slidenum">
+            <a:fld id="{C4388014-CDD0-4E72-8356-7A4AF6595320}" type="slidenum">
               <a:rPr b="0" lang="en-US" sz="1400" spc="-1" strike="noStrike">
                 <a:solidFill>
                   <a:srgbClr val="000000"/>
@@ -512,7 +512,7 @@
                 <a:tab algn="l" pos="0"/>
               </a:tabLst>
             </a:pPr>
-            <a:fld id="{298C341C-7736-4515-A839-EBF5E50D3388}" type="slidenum">
+            <a:fld id="{7147E4BB-464F-4377-8D97-E126EC904303}" type="slidenum">
               <a:rPr b="0" lang="en-US" sz="1800" spc="-1" strike="noStrike">
                 <a:solidFill>
                   <a:schemeClr val="dk1"/>
